--- a/Fase 1 planificacion/Evidencias Proyecto/Evidencias de documentacion/Planificacion del proyecto.pptx
+++ b/Fase 1 planificacion/Evidencias Proyecto/Evidencias de documentacion/Planificacion del proyecto.pptx
@@ -283,7 +283,7 @@
   </p:defaultTextStyle>
   <p:extLst>
     <p:ext uri="GoogleSlidesCustomDataVersion2">
-      <go:slidesCustomData xmlns:go="http://customooxmlschemas.google.com/" r:id="rId39" roundtripDataSignature="AMtx7mig4DUN5Xo2UAOwi9BzgGvLIeUk9w=="/>
+      <go:slidesCustomData xmlns:go="http://customooxmlschemas.google.com/" r:id="rId39" roundtripDataSignature="AMtx7mih90vmlLn9FJCGQ+L73ApxAs7p5g=="/>
     </p:ext>
   </p:extLst>
 </p:presentation>
@@ -13422,9 +13422,9 @@
         <p:grpSpPr>
           <a:xfrm>
             <a:off x="4016548" y="5429000"/>
-            <a:ext cx="7804383" cy="1201165"/>
+            <a:ext cx="7804374" cy="1201165"/>
             <a:chOff x="-150756" y="1587"/>
-            <a:chExt cx="8278755" cy="1259479"/>
+            <a:chExt cx="8278746" cy="1259479"/>
           </a:xfrm>
         </p:grpSpPr>
         <p:sp>
@@ -13435,8 +13435,8 @@
           </p:nvSpPr>
           <p:spPr>
             <a:xfrm>
-              <a:off x="3251199" y="1587"/>
-              <a:ext cx="4876800" cy="1259400"/>
+              <a:off x="3115290" y="1587"/>
+              <a:ext cx="5012700" cy="1259400"/>
             </a:xfrm>
             <a:prstGeom prst="rightArrow">
               <a:avLst>
@@ -13507,8 +13507,8 @@
           </p:nvSpPr>
           <p:spPr>
             <a:xfrm>
-              <a:off x="3251199" y="159014"/>
-              <a:ext cx="4404600" cy="944700"/>
+              <a:off x="3115290" y="159026"/>
+              <a:ext cx="4540500" cy="944700"/>
             </a:xfrm>
             <a:prstGeom prst="rect">
               <a:avLst/>
@@ -15206,12 +15206,16 @@
                 <a:buNone/>
               </a:pPr>
               <a:r>
-                <a:rPr lang="es-419" sz="2700"/>
+                <a:rPr lang="es-419" sz="2900">
+                  <a:solidFill>
+                    <a:schemeClr val="lt1"/>
+                  </a:solidFill>
+                </a:rPr>
                 <a:t>Portal web practicas</a:t>
               </a:r>
-              <a:endParaRPr b="0" i="0" sz="2700" u="none" cap="none" strike="noStrike">
+              <a:endParaRPr b="0" i="0" sz="2900" u="none" cap="none" strike="noStrike">
                 <a:solidFill>
-                  <a:srgbClr val="000000"/>
+                  <a:schemeClr val="lt1"/>
                 </a:solidFill>
                 <a:latin typeface="Arial"/>
                 <a:ea typeface="Arial"/>
@@ -15956,11 +15960,11 @@
         </p:spPr>
         <p:txBody>
           <a:bodyPr anchorCtr="0" anchor="t" bIns="45700" lIns="91425" spcFirstLastPara="1" rIns="91425" wrap="square" tIns="45700">
-            <a:normAutofit fontScale="70000" lnSpcReduction="10000"/>
+            <a:normAutofit fontScale="77500" lnSpcReduction="20000"/>
           </a:bodyPr>
           <a:lstStyle/>
           <a:p>
-            <a:pPr indent="-321945" lvl="0" marL="457200" marR="0" rtl="0" algn="l">
+            <a:pPr indent="-331946" lvl="0" marL="457200" marR="0" rtl="0" algn="l">
               <a:lnSpc>
                 <a:spcPct val="107916"/>
               </a:lnSpc>
@@ -15971,7 +15975,7 @@
                 <a:spcPts val="0"/>
               </a:spcAft>
               <a:buClr>
-                <a:srgbClr val="000000"/>
+                <a:schemeClr val="dk2"/>
               </a:buClr>
               <a:buSzPct val="100000"/>
               <a:buFont typeface="Arial"/>
@@ -15995,27 +15999,7 @@
                   <a:schemeClr val="dk1"/>
                 </a:solidFill>
               </a:rPr>
-              <a:t> web responsivas para exploradores y equipos </a:t>
-            </a:r>
-            <a:r>
-              <a:rPr lang="es-419" sz="2100">
-                <a:solidFill>
-                  <a:schemeClr val="dk1"/>
-                </a:solidFill>
-              </a:rPr>
-              <a:t>móviles</a:t>
-            </a:r>
-            <a:r>
-              <a:rPr b="0" i="0" lang="es-419" sz="2100" u="none" cap="none" strike="noStrike">
-                <a:solidFill>
-                  <a:schemeClr val="dk1"/>
-                </a:solidFill>
-                <a:latin typeface="Arial"/>
-                <a:ea typeface="Arial"/>
-                <a:cs typeface="Arial"/>
-                <a:sym typeface="Arial"/>
-              </a:rPr>
-              <a:t>.</a:t>
+              <a:t> web responsivas.</a:t>
             </a:r>
             <a:endParaRPr b="0" i="0" sz="2100" u="none" cap="none" strike="noStrike">
               <a:solidFill>
@@ -16028,7 +16012,7 @@
             </a:endParaRPr>
           </a:p>
           <a:p>
-            <a:pPr indent="-321945" lvl="0" marL="457200" marR="0" rtl="0" algn="l">
+            <a:pPr indent="-331946" lvl="0" marL="457200" marR="0" rtl="0" algn="l">
               <a:lnSpc>
                 <a:spcPct val="107916"/>
               </a:lnSpc>
@@ -16039,7 +16023,7 @@
                 <a:spcPts val="0"/>
               </a:spcAft>
               <a:buClr>
-                <a:srgbClr val="000000"/>
+                <a:schemeClr val="dk2"/>
               </a:buClr>
               <a:buSzPct val="100000"/>
               <a:buFont typeface="Arial"/>
@@ -16084,7 +16068,7 @@
             </a:endParaRPr>
           </a:p>
           <a:p>
-            <a:pPr indent="-321945" lvl="0" marL="457200" marR="0" rtl="0" algn="l">
+            <a:pPr indent="-329485" lvl="0" marL="457200" marR="0" rtl="0" algn="l">
               <a:lnSpc>
                 <a:spcPct val="107916"/>
               </a:lnSpc>
@@ -16095,64 +16079,27 @@
                 <a:spcPts val="0"/>
               </a:spcAft>
               <a:buClr>
-                <a:srgbClr val="000000"/>
+                <a:schemeClr val="dk2"/>
               </a:buClr>
               <a:buSzPct val="100000"/>
-              <a:buFont typeface="Arial"/>
               <a:buChar char="•"/>
             </a:pPr>
             <a:r>
-              <a:rPr lang="es-419" sz="2100">
+              <a:rPr lang="es-419" sz="2050">
                 <a:solidFill>
                   <a:schemeClr val="dk1"/>
                 </a:solidFill>
               </a:rPr>
-              <a:t>La </a:t>
+              <a:t>Los practicantes podrán postular directamente en la plataforma, adjuntando su CV y otros documentos.</a:t>
             </a:r>
-            <a:r>
-              <a:rPr lang="es-419" sz="2100">
-                <a:solidFill>
-                  <a:schemeClr val="dk1"/>
-                </a:solidFill>
-              </a:rPr>
-              <a:t>aplicación</a:t>
-            </a:r>
-            <a:r>
-              <a:rPr lang="es-419" sz="2100">
-                <a:solidFill>
-                  <a:schemeClr val="dk1"/>
-                </a:solidFill>
-              </a:rPr>
-              <a:t>/web admin  para gestionar las postulaciones por parte del </a:t>
-            </a:r>
-            <a:r>
-              <a:rPr lang="es-419" sz="2100">
-                <a:solidFill>
-                  <a:schemeClr val="dk1"/>
-                </a:solidFill>
-              </a:rPr>
-              <a:t>área</a:t>
-            </a:r>
-            <a:r>
-              <a:rPr lang="es-419" sz="2100">
-                <a:solidFill>
-                  <a:schemeClr val="dk1"/>
-                </a:solidFill>
-              </a:rPr>
-              <a:t> RRHH y el capacitador.</a:t>
-            </a:r>
-            <a:endParaRPr b="0" i="0" sz="2100" u="none" cap="none" strike="noStrike">
+            <a:endParaRPr sz="2050">
               <a:solidFill>
-                <a:srgbClr val="000000"/>
+                <a:schemeClr val="dk1"/>
               </a:solidFill>
-              <a:latin typeface="Arial"/>
-              <a:ea typeface="Arial"/>
-              <a:cs typeface="Arial"/>
-              <a:sym typeface="Arial"/>
             </a:endParaRPr>
           </a:p>
           <a:p>
-            <a:pPr indent="-321945" lvl="0" marL="457200" marR="0" rtl="0" algn="l">
+            <a:pPr indent="-331946" lvl="0" marL="457200" marR="0" rtl="0" algn="l">
               <a:lnSpc>
                 <a:spcPct val="107916"/>
               </a:lnSpc>
@@ -16163,7 +16110,7 @@
                 <a:spcPts val="0"/>
               </a:spcAft>
               <a:buClr>
-                <a:srgbClr val="000000"/>
+                <a:schemeClr val="dk2"/>
               </a:buClr>
               <a:buSzPct val="100000"/>
               <a:buFont typeface="Arial"/>
@@ -16604,7 +16551,7 @@
                 <a:spcPts val="0"/>
               </a:spcAft>
               <a:buClr>
-                <a:schemeClr val="dk1"/>
+                <a:schemeClr val="dk2"/>
               </a:buClr>
               <a:buSzPct val="100000"/>
               <a:buChar char="•"/>
@@ -16631,7 +16578,7 @@
                   <a:schemeClr val="dk1"/>
                 </a:solidFill>
               </a:rPr>
-              <a:t> con archivos que no sean pdf</a:t>
+              <a:t> con archivos que no sean pdf.</a:t>
             </a:r>
             <a:endParaRPr sz="2050">
               <a:solidFill>
@@ -16651,7 +16598,7 @@
                 <a:spcPts val="0"/>
               </a:spcAft>
               <a:buClr>
-                <a:schemeClr val="dk1"/>
+                <a:schemeClr val="dk2"/>
               </a:buClr>
               <a:buSzPct val="100000"/>
               <a:buChar char="•"/>
@@ -16678,7 +16625,7 @@
                   <a:schemeClr val="dk1"/>
                 </a:solidFill>
               </a:rPr>
-              <a:t> archivos con peso mayor a 1MB</a:t>
+              <a:t> archivos con peso mayor a 1MB.</a:t>
             </a:r>
             <a:endParaRPr sz="2050">
               <a:solidFill>
@@ -16698,7 +16645,7 @@
                 <a:spcPts val="0"/>
               </a:spcAft>
               <a:buClr>
-                <a:schemeClr val="dk1"/>
+                <a:schemeClr val="dk2"/>
               </a:buClr>
               <a:buSzPct val="100000"/>
               <a:buChar char="•"/>
@@ -16709,7 +16656,7 @@
                   <a:schemeClr val="dk1"/>
                 </a:solidFill>
               </a:rPr>
-              <a:t>El sistema no genera contratos de práctica, solo valida las postulaciones</a:t>
+              <a:t>El sistema no genera contratos de práctica, solo valida las postulaciones.</a:t>
             </a:r>
             <a:endParaRPr sz="2050">
               <a:solidFill>
@@ -17215,7 +17162,7 @@
                 <a:spcPts val="0"/>
               </a:spcAft>
               <a:buClr>
-                <a:schemeClr val="dk1"/>
+                <a:schemeClr val="dk2"/>
               </a:buClr>
               <a:buSzPts val="1600"/>
               <a:buChar char="•"/>
@@ -17226,7 +17173,7 @@
                   <a:schemeClr val="dk1"/>
                 </a:solidFill>
               </a:rPr>
-              <a:t>El sistema no operará en la nube durante esta etapa, solamente lo hará de manera local</a:t>
+              <a:t>El sistema no operará en la nube durante esta etapa, solamente lo hará de manera local.</a:t>
             </a:r>
             <a:endParaRPr sz="1600">
               <a:solidFill>
@@ -17246,7 +17193,7 @@
                 <a:spcPts val="0"/>
               </a:spcAft>
               <a:buClr>
-                <a:schemeClr val="dk1"/>
+                <a:schemeClr val="dk2"/>
               </a:buClr>
               <a:buSzPts val="1600"/>
               <a:buChar char="•"/>
@@ -17257,7 +17204,7 @@
                   <a:schemeClr val="dk1"/>
                 </a:solidFill>
               </a:rPr>
-              <a:t>El sistema por ahora solo será desarrollado con tecnologías dominadas por nosotros</a:t>
+              <a:t>El sistema por ahora solo será desarrollado con tecnologías dominadas por nosotros.</a:t>
             </a:r>
             <a:endParaRPr sz="1600">
               <a:solidFill>
@@ -19201,8 +19148,8 @@
         </p:blipFill>
         <p:spPr>
           <a:xfrm>
-            <a:off x="1274388" y="777675"/>
-            <a:ext cx="9643224" cy="5769350"/>
+            <a:off x="1074825" y="847713"/>
+            <a:ext cx="10039350" cy="5895975"/>
           </a:xfrm>
           <a:prstGeom prst="rect">
             <a:avLst/>
@@ -21717,23 +21664,7 @@
                   <a:schemeClr val="dk1"/>
                 </a:solidFill>
               </a:rPr>
-              <a:t>hacer una </a:t>
-            </a:r>
-            <a:r>
-              <a:rPr lang="es-419" sz="2000">
-                <a:solidFill>
-                  <a:schemeClr val="dk1"/>
-                </a:solidFill>
-              </a:rPr>
-              <a:t>aplicación</a:t>
-            </a:r>
-            <a:r>
-              <a:rPr lang="es-419" sz="2000">
-                <a:solidFill>
-                  <a:schemeClr val="dk1"/>
-                </a:solidFill>
-              </a:rPr>
-              <a:t> que concentre todas las postulaciones en el </a:t>
+              <a:t>hacer una pagina que concentre todas las postulaciones en el </a:t>
             </a:r>
             <a:r>
               <a:rPr lang="es-419" sz="2000">
@@ -22206,7 +22137,7 @@
         </p:blipFill>
         <p:spPr>
           <a:xfrm>
-            <a:off x="4723000" y="0"/>
+            <a:off x="4733925" y="0"/>
             <a:ext cx="7458075" cy="6858000"/>
           </a:xfrm>
           <a:prstGeom prst="rect">
@@ -22792,7 +22723,7 @@
             <a:tbl>
               <a:tblPr>
                 <a:noFill/>
-                <a:tableStyleId>{1BD70D9B-BCA0-4757-813F-18B425A4B124}</a:tableStyleId>
+                <a:tableStyleId>{A587DCE3-F613-4295-A2CF-AE6D04D64CCF}</a:tableStyleId>
               </a:tblPr>
               <a:tblGrid>
                 <a:gridCol w="2313500"/>
@@ -23769,7 +23700,7 @@
             <a:tbl>
               <a:tblPr>
                 <a:noFill/>
-                <a:tableStyleId>{1BD70D9B-BCA0-4757-813F-18B425A4B124}</a:tableStyleId>
+                <a:tableStyleId>{A587DCE3-F613-4295-A2CF-AE6D04D64CCF}</a:tableStyleId>
               </a:tblPr>
               <a:tblGrid>
                 <a:gridCol w="2313500"/>
@@ -24376,7 +24307,7 @@
             <a:tbl>
               <a:tblPr>
                 <a:noFill/>
-                <a:tableStyleId>{1BD70D9B-BCA0-4757-813F-18B425A4B124}</a:tableStyleId>
+                <a:tableStyleId>{A587DCE3-F613-4295-A2CF-AE6D04D64CCF}</a:tableStyleId>
               </a:tblPr>
               <a:tblGrid>
                 <a:gridCol w="2313500"/>
@@ -25281,7 +25212,7 @@
             <a:tbl>
               <a:tblPr>
                 <a:noFill/>
-                <a:tableStyleId>{1BD70D9B-BCA0-4757-813F-18B425A4B124}</a:tableStyleId>
+                <a:tableStyleId>{A587DCE3-F613-4295-A2CF-AE6D04D64CCF}</a:tableStyleId>
               </a:tblPr>
               <a:tblGrid>
                 <a:gridCol w="2313500"/>
@@ -25856,6 +25787,285 @@
 </file>
 
 <file path=ppt/theme/theme1.xml><?xml version="1.0" encoding="utf-8"?>
+<a:theme xmlns:a="http://schemas.openxmlformats.org/drawingml/2006/main" xmlns:r="http://schemas.openxmlformats.org/officeDocument/2006/relationships" name="Blue &amp; Gold">
+  <a:themeElements>
+    <a:clrScheme name="Blue &amp; Gold">
+      <a:dk1>
+        <a:srgbClr val="FFFFFF"/>
+      </a:dk1>
+      <a:lt1>
+        <a:srgbClr val="01AFD1"/>
+      </a:lt1>
+      <a:dk2>
+        <a:srgbClr val="1E2D31"/>
+      </a:dk2>
+      <a:lt2>
+        <a:srgbClr val="BFC7CA"/>
+      </a:lt2>
+      <a:accent1>
+        <a:srgbClr val="006F85"/>
+      </a:accent1>
+      <a:accent2>
+        <a:srgbClr val="AF4345"/>
+      </a:accent2>
+      <a:accent3>
+        <a:srgbClr val="47D06A"/>
+      </a:accent3>
+      <a:accent4>
+        <a:srgbClr val="F58F8F"/>
+      </a:accent4>
+      <a:accent5>
+        <a:srgbClr val="F6CD4C"/>
+      </a:accent5>
+      <a:accent6>
+        <a:srgbClr val="F8E71C"/>
+      </a:accent6>
+      <a:hlink>
+        <a:srgbClr val="F6CD4C"/>
+      </a:hlink>
+      <a:folHlink>
+        <a:srgbClr val="F6CD4C"/>
+      </a:folHlink>
+    </a:clrScheme>
+    <a:fontScheme name="Office">
+      <a:majorFont>
+        <a:latin typeface="Arial"/>
+        <a:ea typeface=""/>
+        <a:cs typeface=""/>
+        <a:font script="Jpan" typeface="ＭＳ Ｐゴシック"/>
+        <a:font script="Hang" typeface="맑은 고딕"/>
+        <a:font script="Hans" typeface="宋体"/>
+        <a:font script="Hant" typeface="新細明體"/>
+        <a:font script="Arab" typeface="Times New Roman"/>
+        <a:font script="Hebr" typeface="Times New Roman"/>
+        <a:font script="Thai" typeface="Angsana New"/>
+        <a:font script="Ethi" typeface="Nyala"/>
+        <a:font script="Beng" typeface="Vrinda"/>
+        <a:font script="Gujr" typeface="Shruti"/>
+        <a:font script="Khmr" typeface="MoolBoran"/>
+        <a:font script="Knda" typeface="Tunga"/>
+        <a:font script="Guru" typeface="Raavi"/>
+        <a:font script="Cans" typeface="Euphemia"/>
+        <a:font script="Cher" typeface="Plantagenet Cherokee"/>
+        <a:font script="Yiii" typeface="Microsoft Yi Baiti"/>
+        <a:font script="Tibt" typeface="Microsoft Himalaya"/>
+        <a:font script="Thaa" typeface="MV Boli"/>
+        <a:font script="Deva" typeface="Mangal"/>
+        <a:font script="Telu" typeface="Gautami"/>
+        <a:font script="Taml" typeface="Latha"/>
+        <a:font script="Syrc" typeface="Estrangelo Edessa"/>
+        <a:font script="Orya" typeface="Kalinga"/>
+        <a:font script="Mlym" typeface="Kartika"/>
+        <a:font script="Laoo" typeface="DokChampa"/>
+        <a:font script="Sinh" typeface="Iskoola Pota"/>
+        <a:font script="Mong" typeface="Mongolian Baiti"/>
+        <a:font script="Viet" typeface="Times New Roman"/>
+        <a:font script="Uigh" typeface="Microsoft Uighur"/>
+        <a:font script="Geor" typeface="Sylfaen"/>
+      </a:majorFont>
+      <a:minorFont>
+        <a:latin typeface="Arial"/>
+        <a:ea typeface=""/>
+        <a:cs typeface=""/>
+        <a:font script="Jpan" typeface="ＭＳ Ｐゴシック"/>
+        <a:font script="Hang" typeface="맑은 고딕"/>
+        <a:font script="Hans" typeface="宋体"/>
+        <a:font script="Hant" typeface="新細明體"/>
+        <a:font script="Arab" typeface="Arial"/>
+        <a:font script="Hebr" typeface="Arial"/>
+        <a:font script="Thai" typeface="Cordia New"/>
+        <a:font script="Ethi" typeface="Nyala"/>
+        <a:font script="Beng" typeface="Vrinda"/>
+        <a:font script="Gujr" typeface="Shruti"/>
+        <a:font script="Khmr" typeface="DaunPenh"/>
+        <a:font script="Knda" typeface="Tunga"/>
+        <a:font script="Guru" typeface="Raavi"/>
+        <a:font script="Cans" typeface="Euphemia"/>
+        <a:font script="Cher" typeface="Plantagenet Cherokee"/>
+        <a:font script="Yiii" typeface="Microsoft Yi Baiti"/>
+        <a:font script="Tibt" typeface="Microsoft Himalaya"/>
+        <a:font script="Thaa" typeface="MV Boli"/>
+        <a:font script="Deva" typeface="Mangal"/>
+        <a:font script="Telu" typeface="Gautami"/>
+        <a:font script="Taml" typeface="Latha"/>
+        <a:font script="Syrc" typeface="Estrangelo Edessa"/>
+        <a:font script="Orya" typeface="Kalinga"/>
+        <a:font script="Mlym" typeface="Kartika"/>
+        <a:font script="Laoo" typeface="DokChampa"/>
+        <a:font script="Sinh" typeface="Iskoola Pota"/>
+        <a:font script="Mong" typeface="Mongolian Baiti"/>
+        <a:font script="Viet" typeface="Arial"/>
+        <a:font script="Uigh" typeface="Microsoft Uighur"/>
+        <a:font script="Geor" typeface="Sylfaen"/>
+      </a:minorFont>
+    </a:fontScheme>
+    <a:fmtScheme name="Office">
+      <a:fillStyleLst>
+        <a:solidFill>
+          <a:schemeClr val="phClr"/>
+        </a:solidFill>
+        <a:gradFill rotWithShape="1">
+          <a:gsLst>
+            <a:gs pos="0">
+              <a:schemeClr val="phClr">
+                <a:tint val="50000"/>
+                <a:satMod val="300000"/>
+              </a:schemeClr>
+            </a:gs>
+            <a:gs pos="35000">
+              <a:schemeClr val="phClr">
+                <a:tint val="37000"/>
+                <a:satMod val="300000"/>
+              </a:schemeClr>
+            </a:gs>
+            <a:gs pos="100000">
+              <a:schemeClr val="phClr">
+                <a:tint val="15000"/>
+                <a:satMod val="350000"/>
+              </a:schemeClr>
+            </a:gs>
+          </a:gsLst>
+          <a:lin ang="16200000" scaled="1"/>
+        </a:gradFill>
+        <a:gradFill rotWithShape="1">
+          <a:gsLst>
+            <a:gs pos="0">
+              <a:schemeClr val="phClr">
+                <a:tint val="100000"/>
+                <a:shade val="100000"/>
+                <a:satMod val="130000"/>
+              </a:schemeClr>
+            </a:gs>
+            <a:gs pos="100000">
+              <a:schemeClr val="phClr">
+                <a:tint val="50000"/>
+                <a:shade val="100000"/>
+                <a:satMod val="350000"/>
+              </a:schemeClr>
+            </a:gs>
+          </a:gsLst>
+          <a:lin ang="16200000" scaled="0"/>
+        </a:gradFill>
+      </a:fillStyleLst>
+      <a:lnStyleLst>
+        <a:ln w="9525" cap="flat" cmpd="sng" algn="ctr">
+          <a:solidFill>
+            <a:schemeClr val="phClr">
+              <a:shade val="95000"/>
+              <a:satMod val="105000"/>
+            </a:schemeClr>
+          </a:solidFill>
+          <a:prstDash val="solid"/>
+        </a:ln>
+        <a:ln w="25400" cap="flat" cmpd="sng" algn="ctr">
+          <a:solidFill>
+            <a:schemeClr val="phClr"/>
+          </a:solidFill>
+          <a:prstDash val="solid"/>
+        </a:ln>
+        <a:ln w="38100" cap="flat" cmpd="sng" algn="ctr">
+          <a:solidFill>
+            <a:schemeClr val="phClr"/>
+          </a:solidFill>
+          <a:prstDash val="solid"/>
+        </a:ln>
+      </a:lnStyleLst>
+      <a:effectStyleLst>
+        <a:effectStyle>
+          <a:effectLst>
+            <a:outerShdw blurRad="40000" dist="20000" dir="5400000" rotWithShape="0">
+              <a:srgbClr val="000000">
+                <a:alpha val="38000"/>
+              </a:srgbClr>
+            </a:outerShdw>
+          </a:effectLst>
+        </a:effectStyle>
+        <a:effectStyle>
+          <a:effectLst>
+            <a:outerShdw blurRad="40000" dist="23000" dir="5400000" rotWithShape="0">
+              <a:srgbClr val="000000">
+                <a:alpha val="35000"/>
+              </a:srgbClr>
+            </a:outerShdw>
+          </a:effectLst>
+        </a:effectStyle>
+        <a:effectStyle>
+          <a:effectLst>
+            <a:outerShdw blurRad="40000" dist="23000" dir="5400000" rotWithShape="0">
+              <a:srgbClr val="000000">
+                <a:alpha val="35000"/>
+              </a:srgbClr>
+            </a:outerShdw>
+          </a:effectLst>
+          <a:scene3d>
+            <a:camera prst="orthographicFront">
+              <a:rot lat="0" lon="0" rev="0"/>
+            </a:camera>
+            <a:lightRig rig="threePt" dir="t">
+              <a:rot lat="0" lon="0" rev="1200000"/>
+            </a:lightRig>
+          </a:scene3d>
+          <a:sp3d>
+            <a:bevelT w="63500" h="25400"/>
+          </a:sp3d>
+        </a:effectStyle>
+      </a:effectStyleLst>
+      <a:bgFillStyleLst>
+        <a:solidFill>
+          <a:schemeClr val="phClr"/>
+        </a:solidFill>
+        <a:gradFill rotWithShape="1">
+          <a:gsLst>
+            <a:gs pos="0">
+              <a:schemeClr val="phClr">
+                <a:tint val="40000"/>
+                <a:satMod val="350000"/>
+              </a:schemeClr>
+            </a:gs>
+            <a:gs pos="40000">
+              <a:schemeClr val="phClr">
+                <a:tint val="45000"/>
+                <a:shade val="99000"/>
+                <a:satMod val="350000"/>
+              </a:schemeClr>
+            </a:gs>
+            <a:gs pos="100000">
+              <a:schemeClr val="phClr">
+                <a:shade val="20000"/>
+                <a:satMod val="255000"/>
+              </a:schemeClr>
+            </a:gs>
+          </a:gsLst>
+          <a:path path="circle">
+            <a:fillToRect l="50000" t="-80000" r="50000" b="180000"/>
+          </a:path>
+        </a:gradFill>
+        <a:gradFill rotWithShape="1">
+          <a:gsLst>
+            <a:gs pos="0">
+              <a:schemeClr val="phClr">
+                <a:tint val="80000"/>
+                <a:satMod val="300000"/>
+              </a:schemeClr>
+            </a:gs>
+            <a:gs pos="100000">
+              <a:schemeClr val="phClr">
+                <a:shade val="30000"/>
+                <a:satMod val="200000"/>
+              </a:schemeClr>
+            </a:gs>
+          </a:gsLst>
+          <a:path path="circle">
+            <a:fillToRect l="50000" t="50000" r="50000" b="50000"/>
+          </a:path>
+        </a:gradFill>
+      </a:bgFillStyleLst>
+    </a:fmtScheme>
+  </a:themeElements>
+</a:theme>
+</file>
+
+<file path=ppt/theme/theme2.xml><?xml version="1.0" encoding="utf-8"?>
 <a:theme xmlns:a="http://schemas.openxmlformats.org/drawingml/2006/main" xmlns:r="http://schemas.openxmlformats.org/officeDocument/2006/relationships" name="Tema de Office">
   <a:themeElements>
     <a:clrScheme name="Office">
@@ -26132,283 +26342,4 @@
     </a:fmtScheme>
   </a:themeElements>
 </a:theme>
-</file>
-
-<file path=ppt/theme/theme2.xml><?xml version="1.0" encoding="utf-8"?>
-<a:theme xmlns:a="http://schemas.openxmlformats.org/drawingml/2006/main" xmlns:r="http://schemas.openxmlformats.org/officeDocument/2006/relationships" name="Blue &amp; Gold">
-  <a:themeElements>
-    <a:clrScheme name="Blue &amp; Gold">
-      <a:dk1>
-        <a:srgbClr val="FFFFFF"/>
-      </a:dk1>
-      <a:lt1>
-        <a:srgbClr val="01AFD1"/>
-      </a:lt1>
-      <a:dk2>
-        <a:srgbClr val="1E2D31"/>
-      </a:dk2>
-      <a:lt2>
-        <a:srgbClr val="BFC7CA"/>
-      </a:lt2>
-      <a:accent1>
-        <a:srgbClr val="006F85"/>
-      </a:accent1>
-      <a:accent2>
-        <a:srgbClr val="AF4345"/>
-      </a:accent2>
-      <a:accent3>
-        <a:srgbClr val="47D06A"/>
-      </a:accent3>
-      <a:accent4>
-        <a:srgbClr val="F58F8F"/>
-      </a:accent4>
-      <a:accent5>
-        <a:srgbClr val="F6CD4C"/>
-      </a:accent5>
-      <a:accent6>
-        <a:srgbClr val="F8E71C"/>
-      </a:accent6>
-      <a:hlink>
-        <a:srgbClr val="F6CD4C"/>
-      </a:hlink>
-      <a:folHlink>
-        <a:srgbClr val="F6CD4C"/>
-      </a:folHlink>
-    </a:clrScheme>
-    <a:fontScheme name="Office">
-      <a:majorFont>
-        <a:latin typeface="Arial"/>
-        <a:ea typeface=""/>
-        <a:cs typeface=""/>
-        <a:font script="Jpan" typeface="ＭＳ Ｐゴシック"/>
-        <a:font script="Hang" typeface="맑은 고딕"/>
-        <a:font script="Hans" typeface="宋体"/>
-        <a:font script="Hant" typeface="新細明體"/>
-        <a:font script="Arab" typeface="Times New Roman"/>
-        <a:font script="Hebr" typeface="Times New Roman"/>
-        <a:font script="Thai" typeface="Angsana New"/>
-        <a:font script="Ethi" typeface="Nyala"/>
-        <a:font script="Beng" typeface="Vrinda"/>
-        <a:font script="Gujr" typeface="Shruti"/>
-        <a:font script="Khmr" typeface="MoolBoran"/>
-        <a:font script="Knda" typeface="Tunga"/>
-        <a:font script="Guru" typeface="Raavi"/>
-        <a:font script="Cans" typeface="Euphemia"/>
-        <a:font script="Cher" typeface="Plantagenet Cherokee"/>
-        <a:font script="Yiii" typeface="Microsoft Yi Baiti"/>
-        <a:font script="Tibt" typeface="Microsoft Himalaya"/>
-        <a:font script="Thaa" typeface="MV Boli"/>
-        <a:font script="Deva" typeface="Mangal"/>
-        <a:font script="Telu" typeface="Gautami"/>
-        <a:font script="Taml" typeface="Latha"/>
-        <a:font script="Syrc" typeface="Estrangelo Edessa"/>
-        <a:font script="Orya" typeface="Kalinga"/>
-        <a:font script="Mlym" typeface="Kartika"/>
-        <a:font script="Laoo" typeface="DokChampa"/>
-        <a:font script="Sinh" typeface="Iskoola Pota"/>
-        <a:font script="Mong" typeface="Mongolian Baiti"/>
-        <a:font script="Viet" typeface="Times New Roman"/>
-        <a:font script="Uigh" typeface="Microsoft Uighur"/>
-        <a:font script="Geor" typeface="Sylfaen"/>
-      </a:majorFont>
-      <a:minorFont>
-        <a:latin typeface="Arial"/>
-        <a:ea typeface=""/>
-        <a:cs typeface=""/>
-        <a:font script="Jpan" typeface="ＭＳ Ｐゴシック"/>
-        <a:font script="Hang" typeface="맑은 고딕"/>
-        <a:font script="Hans" typeface="宋体"/>
-        <a:font script="Hant" typeface="新細明體"/>
-        <a:font script="Arab" typeface="Arial"/>
-        <a:font script="Hebr" typeface="Arial"/>
-        <a:font script="Thai" typeface="Cordia New"/>
-        <a:font script="Ethi" typeface="Nyala"/>
-        <a:font script="Beng" typeface="Vrinda"/>
-        <a:font script="Gujr" typeface="Shruti"/>
-        <a:font script="Khmr" typeface="DaunPenh"/>
-        <a:font script="Knda" typeface="Tunga"/>
-        <a:font script="Guru" typeface="Raavi"/>
-        <a:font script="Cans" typeface="Euphemia"/>
-        <a:font script="Cher" typeface="Plantagenet Cherokee"/>
-        <a:font script="Yiii" typeface="Microsoft Yi Baiti"/>
-        <a:font script="Tibt" typeface="Microsoft Himalaya"/>
-        <a:font script="Thaa" typeface="MV Boli"/>
-        <a:font script="Deva" typeface="Mangal"/>
-        <a:font script="Telu" typeface="Gautami"/>
-        <a:font script="Taml" typeface="Latha"/>
-        <a:font script="Syrc" typeface="Estrangelo Edessa"/>
-        <a:font script="Orya" typeface="Kalinga"/>
-        <a:font script="Mlym" typeface="Kartika"/>
-        <a:font script="Laoo" typeface="DokChampa"/>
-        <a:font script="Sinh" typeface="Iskoola Pota"/>
-        <a:font script="Mong" typeface="Mongolian Baiti"/>
-        <a:font script="Viet" typeface="Arial"/>
-        <a:font script="Uigh" typeface="Microsoft Uighur"/>
-        <a:font script="Geor" typeface="Sylfaen"/>
-      </a:minorFont>
-    </a:fontScheme>
-    <a:fmtScheme name="Office">
-      <a:fillStyleLst>
-        <a:solidFill>
-          <a:schemeClr val="phClr"/>
-        </a:solidFill>
-        <a:gradFill rotWithShape="1">
-          <a:gsLst>
-            <a:gs pos="0">
-              <a:schemeClr val="phClr">
-                <a:tint val="50000"/>
-                <a:satMod val="300000"/>
-              </a:schemeClr>
-            </a:gs>
-            <a:gs pos="35000">
-              <a:schemeClr val="phClr">
-                <a:tint val="37000"/>
-                <a:satMod val="300000"/>
-              </a:schemeClr>
-            </a:gs>
-            <a:gs pos="100000">
-              <a:schemeClr val="phClr">
-                <a:tint val="15000"/>
-                <a:satMod val="350000"/>
-              </a:schemeClr>
-            </a:gs>
-          </a:gsLst>
-          <a:lin ang="16200000" scaled="1"/>
-        </a:gradFill>
-        <a:gradFill rotWithShape="1">
-          <a:gsLst>
-            <a:gs pos="0">
-              <a:schemeClr val="phClr">
-                <a:tint val="100000"/>
-                <a:shade val="100000"/>
-                <a:satMod val="130000"/>
-              </a:schemeClr>
-            </a:gs>
-            <a:gs pos="100000">
-              <a:schemeClr val="phClr">
-                <a:tint val="50000"/>
-                <a:shade val="100000"/>
-                <a:satMod val="350000"/>
-              </a:schemeClr>
-            </a:gs>
-          </a:gsLst>
-          <a:lin ang="16200000" scaled="0"/>
-        </a:gradFill>
-      </a:fillStyleLst>
-      <a:lnStyleLst>
-        <a:ln w="9525" cap="flat" cmpd="sng" algn="ctr">
-          <a:solidFill>
-            <a:schemeClr val="phClr">
-              <a:shade val="95000"/>
-              <a:satMod val="105000"/>
-            </a:schemeClr>
-          </a:solidFill>
-          <a:prstDash val="solid"/>
-        </a:ln>
-        <a:ln w="25400" cap="flat" cmpd="sng" algn="ctr">
-          <a:solidFill>
-            <a:schemeClr val="phClr"/>
-          </a:solidFill>
-          <a:prstDash val="solid"/>
-        </a:ln>
-        <a:ln w="38100" cap="flat" cmpd="sng" algn="ctr">
-          <a:solidFill>
-            <a:schemeClr val="phClr"/>
-          </a:solidFill>
-          <a:prstDash val="solid"/>
-        </a:ln>
-      </a:lnStyleLst>
-      <a:effectStyleLst>
-        <a:effectStyle>
-          <a:effectLst>
-            <a:outerShdw blurRad="40000" dist="20000" dir="5400000" rotWithShape="0">
-              <a:srgbClr val="000000">
-                <a:alpha val="38000"/>
-              </a:srgbClr>
-            </a:outerShdw>
-          </a:effectLst>
-        </a:effectStyle>
-        <a:effectStyle>
-          <a:effectLst>
-            <a:outerShdw blurRad="40000" dist="23000" dir="5400000" rotWithShape="0">
-              <a:srgbClr val="000000">
-                <a:alpha val="35000"/>
-              </a:srgbClr>
-            </a:outerShdw>
-          </a:effectLst>
-        </a:effectStyle>
-        <a:effectStyle>
-          <a:effectLst>
-            <a:outerShdw blurRad="40000" dist="23000" dir="5400000" rotWithShape="0">
-              <a:srgbClr val="000000">
-                <a:alpha val="35000"/>
-              </a:srgbClr>
-            </a:outerShdw>
-          </a:effectLst>
-          <a:scene3d>
-            <a:camera prst="orthographicFront">
-              <a:rot lat="0" lon="0" rev="0"/>
-            </a:camera>
-            <a:lightRig rig="threePt" dir="t">
-              <a:rot lat="0" lon="0" rev="1200000"/>
-            </a:lightRig>
-          </a:scene3d>
-          <a:sp3d>
-            <a:bevelT w="63500" h="25400"/>
-          </a:sp3d>
-        </a:effectStyle>
-      </a:effectStyleLst>
-      <a:bgFillStyleLst>
-        <a:solidFill>
-          <a:schemeClr val="phClr"/>
-        </a:solidFill>
-        <a:gradFill rotWithShape="1">
-          <a:gsLst>
-            <a:gs pos="0">
-              <a:schemeClr val="phClr">
-                <a:tint val="40000"/>
-                <a:satMod val="350000"/>
-              </a:schemeClr>
-            </a:gs>
-            <a:gs pos="40000">
-              <a:schemeClr val="phClr">
-                <a:tint val="45000"/>
-                <a:shade val="99000"/>
-                <a:satMod val="350000"/>
-              </a:schemeClr>
-            </a:gs>
-            <a:gs pos="100000">
-              <a:schemeClr val="phClr">
-                <a:shade val="20000"/>
-                <a:satMod val="255000"/>
-              </a:schemeClr>
-            </a:gs>
-          </a:gsLst>
-          <a:path path="circle">
-            <a:fillToRect l="50000" t="-80000" r="50000" b="180000"/>
-          </a:path>
-        </a:gradFill>
-        <a:gradFill rotWithShape="1">
-          <a:gsLst>
-            <a:gs pos="0">
-              <a:schemeClr val="phClr">
-                <a:tint val="80000"/>
-                <a:satMod val="300000"/>
-              </a:schemeClr>
-            </a:gs>
-            <a:gs pos="100000">
-              <a:schemeClr val="phClr">
-                <a:shade val="30000"/>
-                <a:satMod val="200000"/>
-              </a:schemeClr>
-            </a:gs>
-          </a:gsLst>
-          <a:path path="circle">
-            <a:fillToRect l="50000" t="50000" r="50000" b="50000"/>
-          </a:path>
-        </a:gradFill>
-      </a:bgFillStyleLst>
-    </a:fmtScheme>
-  </a:themeElements>
-</a:theme>
 </file>